--- a/Football_Performance_Checkpoint2_Final.pptx
+++ b/Football_Performance_Checkpoint2_Final.pptx
@@ -4213,7 +4213,7 @@
           </a:prstGeom>
           <a:extLst>
             <a:ext uri="{C572A759-6A51-4108-AA02-DFA0A04FC94B}">
-              <ma14:wrappingTextBoxFlag xmlns:ma14="http://schemas.microsoft.com/office/mac/drawingml/2011/main" xmlns="" val="0"/>
+              <ma14:wrappingTextBoxFlag xmlns="" xmlns:ma14="http://schemas.microsoft.com/office/mac/drawingml/2011/main" val="0"/>
             </a:ext>
           </a:extLst>
         </p:spPr>
@@ -4235,7 +4235,7 @@
             <a:pPr algn="r"/>
             <a:fld id="{F7021451-1387-4CA6-816F-3879F97B5CBC}" type="slidenum">
               <a:rPr lang="en-US" b="0"/>
-              <a:t>‹nº›</a:t>
+              <a:t>‹#›</a:t>
             </a:fld>
             <a:endParaRPr lang="en-US"/>
           </a:p>
@@ -4291,7 +4291,7 @@
           </a:prstGeom>
           <a:extLst>
             <a:ext uri="{C572A759-6A51-4108-AA02-DFA0A04FC94B}">
-              <ma14:wrappingTextBoxFlag xmlns:ma14="http://schemas.microsoft.com/office/mac/drawingml/2011/main" xmlns="" val="0"/>
+              <ma14:wrappingTextBoxFlag xmlns="" xmlns:ma14="http://schemas.microsoft.com/office/mac/drawingml/2011/main" val="0"/>
             </a:ext>
           </a:extLst>
         </p:spPr>
@@ -4313,7 +4313,7 @@
             <a:pPr algn="r"/>
             <a:fld id="{F7021451-1387-4CA6-816F-3879F97B5CBC}" type="slidenum">
               <a:rPr lang="en-US" b="0"/>
-              <a:t>‹nº›</a:t>
+              <a:t>‹#›</a:t>
             </a:fld>
             <a:endParaRPr lang="en-US"/>
           </a:p>
@@ -4961,7 +4961,7 @@
           </a:prstGeom>
           <a:extLst>
             <a:ext uri="{C572A759-6A51-4108-AA02-DFA0A04FC94B}">
-              <ma14:wrappingTextBoxFlag xmlns:ma14="http://schemas.microsoft.com/office/mac/drawingml/2011/main" xmlns="" val="0"/>
+              <ma14:wrappingTextBoxFlag xmlns="" xmlns:ma14="http://schemas.microsoft.com/office/mac/drawingml/2011/main" val="0"/>
             </a:ext>
           </a:extLst>
         </p:spPr>
@@ -4989,6 +4989,53 @@
           </a:p>
         </p:txBody>
       </p:sp>
+      <p:pic>
+        <p:nvPicPr>
+          <p:cNvPr id="1026" name="Picture 2" descr="Cursos – Politécnico de Santarém">
+            <a:extLst>
+              <a:ext uri="{FF2B5EF4-FFF2-40B4-BE49-F238E27FC236}">
+                <a16:creationId xmlns:a16="http://schemas.microsoft.com/office/drawing/2014/main" id="{19675799-9016-D6AA-488F-DAB3EECE6290}"/>
+              </a:ext>
+            </a:extLst>
+          </p:cNvPr>
+          <p:cNvPicPr>
+            <a:picLocks noChangeAspect="1" noChangeArrowheads="1"/>
+          </p:cNvPicPr>
+          <p:nvPr/>
+        </p:nvPicPr>
+        <p:blipFill>
+          <a:blip r:embed="rId4">
+            <a:extLst>
+              <a:ext uri="{28A0092B-C50C-407E-A947-70E740481C1C}">
+                <a14:useLocalDpi xmlns:a14="http://schemas.microsoft.com/office/drawing/2010/main" val="0"/>
+              </a:ext>
+            </a:extLst>
+          </a:blip>
+          <a:srcRect/>
+          <a:stretch>
+            <a:fillRect/>
+          </a:stretch>
+        </p:blipFill>
+        <p:spPr bwMode="auto">
+          <a:xfrm>
+            <a:off x="-146510" y="5994251"/>
+            <a:ext cx="3092823" cy="884354"/>
+          </a:xfrm>
+          <a:prstGeom prst="rect">
+            <a:avLst/>
+          </a:prstGeom>
+          <a:noFill/>
+          <a:extLst>
+            <a:ext uri="{909E8E84-426E-40DD-AFC4-6F175D3DCCD1}">
+              <a14:hiddenFill xmlns:a14="http://schemas.microsoft.com/office/drawing/2010/main">
+                <a:solidFill>
+                  <a:srgbClr val="FFFFFF"/>
+                </a:solidFill>
+              </a14:hiddenFill>
+            </a:ext>
+          </a:extLst>
+        </p:spPr>
+      </p:pic>
     </p:spTree>
   </p:cSld>
   <p:clrMapOvr>
@@ -5395,7 +5442,7 @@
           </a:prstGeom>
           <a:extLst>
             <a:ext uri="{C572A759-6A51-4108-AA02-DFA0A04FC94B}">
-              <ma14:wrappingTextBoxFlag xmlns:ma14="http://schemas.microsoft.com/office/mac/drawingml/2011/main" xmlns="" val="0"/>
+              <ma14:wrappingTextBoxFlag xmlns="" xmlns:ma14="http://schemas.microsoft.com/office/mac/drawingml/2011/main" val="0"/>
             </a:ext>
           </a:extLst>
         </p:spPr>
@@ -5785,7 +5832,7 @@
           </a:prstGeom>
           <a:extLst>
             <a:ext uri="{C572A759-6A51-4108-AA02-DFA0A04FC94B}">
-              <ma14:wrappingTextBoxFlag xmlns:ma14="http://schemas.microsoft.com/office/mac/drawingml/2011/main" xmlns="" val="0"/>
+              <ma14:wrappingTextBoxFlag xmlns="" xmlns:ma14="http://schemas.microsoft.com/office/mac/drawingml/2011/main" val="0"/>
             </a:ext>
           </a:extLst>
         </p:spPr>
@@ -6525,7 +6572,7 @@
           </a:prstGeom>
           <a:extLst>
             <a:ext uri="{C572A759-6A51-4108-AA02-DFA0A04FC94B}">
-              <ma14:wrappingTextBoxFlag xmlns:ma14="http://schemas.microsoft.com/office/mac/drawingml/2011/main" xmlns="" val="0"/>
+              <ma14:wrappingTextBoxFlag xmlns="" xmlns:ma14="http://schemas.microsoft.com/office/mac/drawingml/2011/main" val="0"/>
             </a:ext>
           </a:extLst>
         </p:spPr>
@@ -7964,7 +8011,7 @@
           </a:prstGeom>
           <a:extLst>
             <a:ext uri="{C572A759-6A51-4108-AA02-DFA0A04FC94B}">
-              <ma14:wrappingTextBoxFlag xmlns:ma14="http://schemas.microsoft.com/office/mac/drawingml/2011/main" xmlns="" val="0"/>
+              <ma14:wrappingTextBoxFlag xmlns="" xmlns:ma14="http://schemas.microsoft.com/office/mac/drawingml/2011/main" val="0"/>
             </a:ext>
           </a:extLst>
         </p:spPr>
@@ -8859,7 +8906,7 @@
           </a:prstGeom>
           <a:extLst>
             <a:ext uri="{C572A759-6A51-4108-AA02-DFA0A04FC94B}">
-              <ma14:wrappingTextBoxFlag xmlns:ma14="http://schemas.microsoft.com/office/mac/drawingml/2011/main" xmlns="" val="0"/>
+              <ma14:wrappingTextBoxFlag xmlns="" xmlns:ma14="http://schemas.microsoft.com/office/mac/drawingml/2011/main" val="0"/>
             </a:ext>
           </a:extLst>
         </p:spPr>
@@ -9532,7 +9579,7 @@
           </a:prstGeom>
           <a:extLst>
             <a:ext uri="{C572A759-6A51-4108-AA02-DFA0A04FC94B}">
-              <ma14:wrappingTextBoxFlag xmlns:ma14="http://schemas.microsoft.com/office/mac/drawingml/2011/main" xmlns="" val="0"/>
+              <ma14:wrappingTextBoxFlag xmlns="" xmlns:ma14="http://schemas.microsoft.com/office/mac/drawingml/2011/main" val="0"/>
             </a:ext>
           </a:extLst>
         </p:spPr>
@@ -9932,7 +9979,7 @@
           </a:prstGeom>
           <a:extLst>
             <a:ext uri="{C572A759-6A51-4108-AA02-DFA0A04FC94B}">
-              <ma14:wrappingTextBoxFlag xmlns:ma14="http://schemas.microsoft.com/office/mac/drawingml/2011/main" xmlns="" val="0"/>
+              <ma14:wrappingTextBoxFlag xmlns="" xmlns:ma14="http://schemas.microsoft.com/office/mac/drawingml/2011/main" val="0"/>
             </a:ext>
           </a:extLst>
         </p:spPr>
@@ -10386,7 +10433,7 @@
           </a:prstGeom>
           <a:extLst>
             <a:ext uri="{C572A759-6A51-4108-AA02-DFA0A04FC94B}">
-              <ma14:wrappingTextBoxFlag xmlns:ma14="http://schemas.microsoft.com/office/mac/drawingml/2011/main" xmlns="" val="0"/>
+              <ma14:wrappingTextBoxFlag xmlns="" xmlns:ma14="http://schemas.microsoft.com/office/mac/drawingml/2011/main" val="0"/>
             </a:ext>
           </a:extLst>
         </p:spPr>
@@ -10786,7 +10833,7 @@
           </a:prstGeom>
           <a:extLst>
             <a:ext uri="{C572A759-6A51-4108-AA02-DFA0A04FC94B}">
-              <ma14:wrappingTextBoxFlag xmlns:ma14="http://schemas.microsoft.com/office/mac/drawingml/2011/main" xmlns="" val="0"/>
+              <ma14:wrappingTextBoxFlag xmlns="" xmlns:ma14="http://schemas.microsoft.com/office/mac/drawingml/2011/main" val="0"/>
             </a:ext>
           </a:extLst>
         </p:spPr>
@@ -11330,7 +11377,7 @@
           </a:prstGeom>
           <a:extLst>
             <a:ext uri="{C572A759-6A51-4108-AA02-DFA0A04FC94B}">
-              <ma14:wrappingTextBoxFlag xmlns:ma14="http://schemas.microsoft.com/office/mac/drawingml/2011/main" xmlns="" val="0"/>
+              <ma14:wrappingTextBoxFlag xmlns="" xmlns:ma14="http://schemas.microsoft.com/office/mac/drawingml/2011/main" val="0"/>
             </a:ext>
           </a:extLst>
         </p:spPr>
@@ -11687,7 +11734,7 @@
           </a:prstGeom>
           <a:extLst>
             <a:ext uri="{C572A759-6A51-4108-AA02-DFA0A04FC94B}">
-              <ma14:wrappingTextBoxFlag xmlns:ma14="http://schemas.microsoft.com/office/mac/drawingml/2011/main" xmlns="" val="0"/>
+              <ma14:wrappingTextBoxFlag xmlns="" xmlns:ma14="http://schemas.microsoft.com/office/mac/drawingml/2011/main" val="0"/>
             </a:ext>
           </a:extLst>
         </p:spPr>
